--- a/docs/提出物チェッカー_使い方ガイド.pptx
+++ b/docs/提出物チェッカー_使い方ガイド.pptx
@@ -126,7 +126,7 @@
   <p:extLst>
     <p:ext uri="{521415D9-36F7-43E2-AB2F-B90AF26B5E84}">
       <p14:sectionLst xmlns:p14="http://schemas.microsoft.com/office/powerpoint/2010/main">
-        <p14:section name="はじめに" id="{2297137a-db0f-8e54-f0f8-8fec923fa895}">
+        <p14:section name="はじめに" id="{7519de75-94fa-ecc9-6bee-475e3d2b6cd7}">
           <p14:sldIdLst>
             <p14:sldId id="256"/>
             <p14:sldId id="257"/>
@@ -134,27 +134,27 @@
             <p14:sldId id="259"/>
           </p14:sldIdLst>
         </p14:section>
-        <p14:section name="準備" id="{8fc1920a-9e1d-4ad5-f35c-05029d5ec708}">
+        <p14:section name="準備" id="{5435d355-a718-dff0-3c2b-362b7e4c1922}">
           <p14:sldIdLst>
             <p14:sldId id="260"/>
             <p14:sldId id="261"/>
             <p14:sldId id="262"/>
           </p14:sldIdLst>
         </p14:section>
-        <p14:section name="毎日の使い方" id="{a95d151b-8e9b-9652-5e6f-48b7e25ddef8}">
+        <p14:section name="毎日の使い方" id="{ec5b196d-d3d3-d401-e116-fbf4638a70b4}">
           <p14:sldIdLst>
             <p14:sldId id="263"/>
             <p14:sldId id="264"/>
             <p14:sldId id="265"/>
           </p14:sldIdLst>
         </p14:section>
-        <p14:section name="メール" id="{f2c0e75d-fd8f-9d1d-4115-70b9bd54b30f}">
+        <p14:section name="メール" id="{77471a7c-d28b-0783-74ba-8d45f3d2f158}">
           <p14:sldIdLst>
             <p14:sldId id="266"/>
             <p14:sldId id="267"/>
           </p14:sldIdLst>
         </p14:section>
-        <p14:section name="印刷と掲示" id="{ce842320-fd1f-b686-8692-708b182b2ff7}">
+        <p14:section name="印刷と掲示" id="{51024399-8b45-2982-4e97-bb3d0a14fd7d}">
           <p14:sldIdLst>
             <p14:sldId id="268"/>
             <p14:sldId id="269"/>
@@ -162,7 +162,7 @@
             <p14:sldId id="271"/>
           </p14:sldIdLst>
         </p14:section>
-        <p14:section name="データと困ったとき" id="{b880d08b-8274-84a6-736d-b0be64957c5a}">
+        <p14:section name="データと困ったとき" id="{058128a1-5a38-c2bc-a223-6a91dc3b50c6}">
           <p14:sldIdLst>
             <p14:sldId id="272"/>
             <p14:sldId id="273"/>
@@ -574,7 +574,7 @@
           <a:p>
             <a:r>
               <a:rPr lang="en-US" dirty="0"/>
-              <a:t>提出物チェッカーの使い方を、すべての機能について説明します。提出物を回収したその場で番号を押していくだけで、まだ出していない生徒の番号がすぐに分かるアプリです。</a:t>
+              <a:t>提出物チェッカーの使い方を、すべての機能について説明します。提出物を受け取ったら、その生徒の番号を押していきます。押されずに残った番号が、まだ出していない生徒なので、未提出の生徒がすぐに分かります。</a:t>
             </a:r>
             <a:endParaRPr lang="en-US" dirty="0"/>
           </a:p>
@@ -2392,7 +2392,7 @@
         <p:spPr>
           <a:xfrm>
             <a:off x="640080" y="3566160"/>
-            <a:ext cx="5669280" cy="1463040"/>
+            <a:ext cx="5943600" cy="1463040"/>
           </a:xfrm>
           <a:prstGeom prst="rect">
             <a:avLst/>
@@ -2405,7 +2405,7 @@
           <a:lstStyle>
             <a:lvl1pPr algn="l" indent="0" marL="0">
               <a:buNone/>
-              <a:defRPr lang="en-US" sz="1800" dirty="0">
+              <a:defRPr lang="en-US" sz="1700" dirty="0">
                 <a:solidFill>
                   <a:schemeClr val="bg2"/>
                 </a:solidFill>
@@ -2416,7 +2416,7 @@
             <a:pPr algn="l" indent="0" marL="0">
               <a:buNone/>
             </a:pPr>
-            <a:endParaRPr lang="en-US" sz="1800" dirty="0"/>
+            <a:endParaRPr lang="en-US" sz="1700" dirty="0"/>
           </a:p>
         </p:txBody>
       </p:sp>
@@ -2984,7 +2984,7 @@
         <p:spPr>
           <a:xfrm>
             <a:off x="640080" y="3566160"/>
-            <a:ext cx="5669280" cy="1463040"/>
+            <a:ext cx="5943600" cy="1463040"/>
           </a:xfrm>
           <a:prstGeom prst="rect">
             <a:avLst/>
@@ -3000,28 +3000,28 @@
               <a:buNone/>
             </a:pPr>
             <a:r>
-              <a:rPr lang="en-US" sz="1800" dirty="0">
+              <a:rPr lang="en-US" sz="1700" dirty="0">
                 <a:solidFill>
                   <a:schemeClr val="bg2"/>
                 </a:solidFill>
               </a:rPr>
-              <a:t>出した子の番号を押すだけで、</a:t>
-            </a:r>
-            <a:endParaRPr lang="en-US" sz="1800" dirty="0"/>
+              <a:t>提出物を受け取ったら、その生徒の番号を押すだけ。</a:t>
+            </a:r>
+            <a:endParaRPr lang="en-US" sz="1700" dirty="0"/>
           </a:p>
           <a:p>
             <a:pPr algn="l" indent="0" marL="0">
               <a:buNone/>
             </a:pPr>
             <a:r>
-              <a:rPr lang="en-US" sz="1800" dirty="0">
+              <a:rPr lang="en-US" sz="1700" dirty="0">
                 <a:solidFill>
                   <a:schemeClr val="bg2"/>
                 </a:solidFill>
               </a:rPr>
-              <a:t>まだ出していない子がすぐ分かる</a:t>
-            </a:r>
-            <a:endParaRPr lang="en-US" sz="1800" dirty="0"/>
+              <a:t>押されずに残った番号が、まだ出していない生徒です。</a:t>
+            </a:r>
+            <a:endParaRPr lang="en-US" sz="1700" dirty="0"/>
           </a:p>
         </p:txBody>
       </p:sp>
@@ -10431,7 +10431,7 @@
         <p:spPr>
           <a:xfrm>
             <a:off x="640080" y="3566160"/>
-            <a:ext cx="5669280" cy="1463040"/>
+            <a:ext cx="5943600" cy="1463040"/>
           </a:xfrm>
           <a:prstGeom prst="rect">
             <a:avLst/>
@@ -10447,28 +10447,28 @@
               <a:buNone/>
             </a:pPr>
             <a:r>
-              <a:rPr lang="en-US" sz="1800" dirty="0">
+              <a:rPr lang="en-US" sz="1700" dirty="0">
                 <a:solidFill>
                   <a:schemeClr val="bg2"/>
                 </a:solidFill>
               </a:rPr>
-              <a:t>一冊受け取って、一つ押す。</a:t>
-            </a:r>
-            <a:endParaRPr lang="en-US" sz="1800" dirty="0"/>
+              <a:t>一冊受け取ったら、一つ押す。</a:t>
+            </a:r>
+            <a:endParaRPr lang="en-US" sz="1700" dirty="0"/>
           </a:p>
           <a:p>
             <a:pPr algn="l" indent="0" marL="0">
               <a:buNone/>
             </a:pPr>
             <a:r>
-              <a:rPr lang="en-US" sz="1800" dirty="0">
+              <a:rPr lang="en-US" sz="1700" dirty="0">
                 <a:solidFill>
                   <a:schemeClr val="bg2"/>
                 </a:solidFill>
               </a:rPr>
-              <a:t>残った番号がすぐ見えます。</a:t>
-            </a:r>
-            <a:endParaRPr lang="en-US" sz="1800" dirty="0"/>
+              <a:t>押されずに残った番号が、未提出の生徒です。</a:t>
+            </a:r>
+            <a:endParaRPr lang="en-US" sz="1700" dirty="0"/>
           </a:p>
         </p:txBody>
       </p:sp>
@@ -11198,7 +11198,7 @@
                   <a:schemeClr val="tx1"/>
                 </a:solidFill>
               </a:rPr>
-              <a:t>出した子の番号のマスを押す。番号入力もできる</a:t>
+              <a:t>提出した生徒の番号のマスを押す。番号入力もできる</a:t>
             </a:r>
             <a:endParaRPr lang="en-US" sz="1400" dirty="0"/>
           </a:p>
@@ -14947,7 +14947,7 @@
                   <a:schemeClr val="tx2"/>
                 </a:solidFill>
               </a:rPr>
-              <a:t>チェック入力：出した子の番号を押す</a:t>
+              <a:t>チェック入力：提出した生徒の番号を押す</a:t>
             </a:r>
             <a:endParaRPr lang="en-US" sz="3000" dirty="0"/>
           </a:p>
